--- a/Isuzu Universe/ISUZU_UNIVERSE_3_0_DECK_2026-09-23.pptx
+++ b/Isuzu Universe/ISUZU_UNIVERSE_3_0_DECK_2026-09-23.pptx
@@ -875,7 +875,7 @@
           <a:lstStyle/>
           <a:p>
             <a:r>
-              <a:t>334 of the 519 dealers in our network file already carry a recorded IDS score, minimum zero, maximum 100, average 77.5. That is two-thirds of the known estate with an individual result already on file, and it is the only place in this programme where ISZE holds something a dealer will want to look at and cannot easily assemble itself. So the IDS profile should be the opening offer, not a later step. Right now the design brings a review to the dealer first, which reads as a supplier's opinion of its business.</a:t>
+              <a:t>490 of the 519 dealers in our network file carry a recorded Dealer Standards score, minimum above zero, maximum 100, average 79.3. A further 29 recorded no answers at all and are held apart from the distribution, because no score exists for them. That is almost all of the known already on file, and it is the only place in this programme where ISZE holds something a dealer will want to look at and cannot easily assemble itself. So the IDS profile should be the opening offer, not a later step. Right now the design brings a review to the dealer first, which reads as a supplier's opinion of its business.</a:t>
             </a:r>
           </a:p>
         </p:txBody>
@@ -7182,8 +7182,8 @@
         </p:blipFill>
         <p:spPr>
           <a:xfrm>
-            <a:off x="1424691" y="1783080"/>
-            <a:ext cx="9342311" cy="4160520"/>
+            <a:off x="1018504" y="1783080"/>
+            <a:ext cx="10154686" cy="4160520"/>
           </a:xfrm>
           <a:prstGeom prst="rect">
             <a:avLst/>
